--- a/auca/Sem-5/Requirements Engineering/Notes/Lesson 4-1.pptx
+++ b/auca/Sem-5/Requirements Engineering/Notes/Lesson 4-1.pptx
@@ -243,7 +243,7 @@
           <a:p>
             <a:fld id="{3BA1C966-0D86-46E7-AD63-E3A9531956A6}" type="datetimeFigureOut">
               <a:rPr lang="en-US" smtClean="0"/>
-              <a:t>6/30/2026</a:t>
+              <a:t>7/14/2026</a:t>
             </a:fld>
             <a:endParaRPr lang="en-US"/>
           </a:p>
@@ -1152,6 +1152,10 @@
             <a:br>
               <a:rPr lang="en-US" dirty="0"/>
             </a:br>
+            <a:r>
+              <a:rPr lang="en-US" dirty="0"/>
+              <a:t/>
+            </a:r>
             <a:br>
               <a:rPr lang="en-US" dirty="0"/>
             </a:br>
@@ -3247,7 +3251,7 @@
           <a:p>
             <a:fld id="{5BCAD085-E8A6-8845-BD4E-CB4CCA059FC4}" type="datetimeFigureOut">
               <a:rPr lang="en-US" smtClean="0"/>
-              <a:t>6/29/2026</a:t>
+              <a:t>7/14/2026</a:t>
             </a:fld>
             <a:endParaRPr lang="en-US"/>
           </a:p>
@@ -3410,7 +3414,7 @@
           <a:p>
             <a:fld id="{5BCAD085-E8A6-8845-BD4E-CB4CCA059FC4}" type="datetimeFigureOut">
               <a:rPr lang="en-US" smtClean="0"/>
-              <a:t>6/29/2026</a:t>
+              <a:t>7/14/2026</a:t>
             </a:fld>
             <a:endParaRPr lang="en-US"/>
           </a:p>
@@ -3583,7 +3587,7 @@
           <a:p>
             <a:fld id="{5BCAD085-E8A6-8845-BD4E-CB4CCA059FC4}" type="datetimeFigureOut">
               <a:rPr lang="en-US" smtClean="0"/>
-              <a:t>6/29/2026</a:t>
+              <a:t>7/14/2026</a:t>
             </a:fld>
             <a:endParaRPr lang="en-US"/>
           </a:p>
@@ -3746,7 +3750,7 @@
           <a:p>
             <a:fld id="{5BCAD085-E8A6-8845-BD4E-CB4CCA059FC4}" type="datetimeFigureOut">
               <a:rPr lang="en-US" smtClean="0"/>
-              <a:t>6/29/2026</a:t>
+              <a:t>7/14/2026</a:t>
             </a:fld>
             <a:endParaRPr lang="en-US"/>
           </a:p>
@@ -3986,7 +3990,7 @@
           <a:p>
             <a:fld id="{5BCAD085-E8A6-8845-BD4E-CB4CCA059FC4}" type="datetimeFigureOut">
               <a:rPr lang="en-US" smtClean="0"/>
-              <a:t>6/29/2026</a:t>
+              <a:t>7/14/2026</a:t>
             </a:fld>
             <a:endParaRPr lang="en-US"/>
           </a:p>
@@ -4266,7 +4270,7 @@
           <a:p>
             <a:fld id="{5BCAD085-E8A6-8845-BD4E-CB4CCA059FC4}" type="datetimeFigureOut">
               <a:rPr lang="en-US" smtClean="0"/>
-              <a:t>6/29/2026</a:t>
+              <a:t>7/14/2026</a:t>
             </a:fld>
             <a:endParaRPr lang="en-US"/>
           </a:p>
@@ -4680,7 +4684,7 @@
           <a:p>
             <a:fld id="{5BCAD085-E8A6-8845-BD4E-CB4CCA059FC4}" type="datetimeFigureOut">
               <a:rPr lang="en-US" smtClean="0"/>
-              <a:t>6/29/2026</a:t>
+              <a:t>7/14/2026</a:t>
             </a:fld>
             <a:endParaRPr lang="en-US"/>
           </a:p>
@@ -4792,7 +4796,7 @@
           <a:p>
             <a:fld id="{5BCAD085-E8A6-8845-BD4E-CB4CCA059FC4}" type="datetimeFigureOut">
               <a:rPr lang="en-US" smtClean="0"/>
-              <a:t>6/29/2026</a:t>
+              <a:t>7/14/2026</a:t>
             </a:fld>
             <a:endParaRPr lang="en-US"/>
           </a:p>
@@ -4882,7 +4886,7 @@
           <a:p>
             <a:fld id="{5BCAD085-E8A6-8845-BD4E-CB4CCA059FC4}" type="datetimeFigureOut">
               <a:rPr lang="en-US" smtClean="0"/>
-              <a:t>6/29/2026</a:t>
+              <a:t>7/14/2026</a:t>
             </a:fld>
             <a:endParaRPr lang="en-US"/>
           </a:p>
@@ -5152,7 +5156,7 @@
           <a:p>
             <a:fld id="{5BCAD085-E8A6-8845-BD4E-CB4CCA059FC4}" type="datetimeFigureOut">
               <a:rPr lang="en-US" smtClean="0"/>
-              <a:t>6/29/2026</a:t>
+              <a:t>7/14/2026</a:t>
             </a:fld>
             <a:endParaRPr lang="en-US"/>
           </a:p>
@@ -5399,7 +5403,7 @@
           <a:p>
             <a:fld id="{5BCAD085-E8A6-8845-BD4E-CB4CCA059FC4}" type="datetimeFigureOut">
               <a:rPr lang="en-US" smtClean="0"/>
-              <a:t>6/29/2026</a:t>
+              <a:t>7/14/2026</a:t>
             </a:fld>
             <a:endParaRPr lang="en-US"/>
           </a:p>
@@ -5605,7 +5609,7 @@
           <a:p>
             <a:fld id="{5BCAD085-E8A6-8845-BD4E-CB4CCA059FC4}" type="datetimeFigureOut">
               <a:rPr lang="en-US" smtClean="0"/>
-              <a:t>6/29/2026</a:t>
+              <a:t>7/14/2026</a:t>
             </a:fld>
             <a:endParaRPr lang="en-US"/>
           </a:p>
@@ -11032,13 +11036,13 @@
           <p:nvPr>
             <p:extLst>
               <p:ext uri="{D42A27DB-BD31-4B8C-83A1-F6EECF244321}">
-                <p14:modId xmlns:p14="http://schemas.microsoft.com/office/powerpoint/2010/main" val="2081819700"/>
+                <p14:modId xmlns:p14="http://schemas.microsoft.com/office/powerpoint/2010/main" val="2562629056"/>
               </p:ext>
             </p:extLst>
           </p:nvPr>
         </p:nvGraphicFramePr>
         <p:xfrm>
-          <a:off x="2761488" y="2129029"/>
+          <a:off x="2834640" y="2322069"/>
           <a:ext cx="4754880" cy="3002280"/>
         </p:xfrm>
         <a:graphic>
@@ -11254,7 +11258,7 @@
         </p:nvSpPr>
         <p:spPr>
           <a:xfrm>
-            <a:off x="3931920" y="2894997"/>
+            <a:off x="3931920" y="2971801"/>
             <a:ext cx="1078992" cy="658368"/>
           </a:xfrm>
           <a:prstGeom prst="rect">
@@ -11305,7 +11309,7 @@
         </p:nvSpPr>
         <p:spPr>
           <a:xfrm>
-            <a:off x="3931920" y="3935572"/>
+            <a:off x="3931920" y="4101083"/>
             <a:ext cx="1078992" cy="658368"/>
           </a:xfrm>
           <a:prstGeom prst="rect">
